--- a/assets/ppts/M2.2.3_Unicast_Routing_Dijkstra_RIP.pptx
+++ b/assets/ppts/M2.2.3_Unicast_Routing_Dijkstra_RIP.pptx
@@ -3142,8 +3142,8 @@
         </p:nvSpPr>
         <p:spPr>
           <a:xfrm>
-            <a:off x="822960" y="1188720"/>
-            <a:ext cx="164592" cy="4480560"/>
+            <a:off x="0" y="0"/>
+            <a:ext cx="12191695" cy="137160"/>
           </a:xfrm>
           <a:prstGeom prst="rect">
             <a:avLst/>
@@ -3179,14 +3179,57 @@
       </p:sp>
       <p:sp>
         <p:nvSpPr>
-          <p:cNvPr id="4" name="TextBox 3"/>
+          <p:cNvPr id="4" name="Rectangle 3"/>
+          <p:cNvSpPr/>
+          <p:nvPr/>
+        </p:nvSpPr>
+        <p:spPr>
+          <a:xfrm>
+            <a:off x="822960" y="1097280"/>
+            <a:ext cx="164592" cy="4663440"/>
+          </a:xfrm>
+          <a:prstGeom prst="rect">
+            <a:avLst/>
+          </a:prstGeom>
+          <a:solidFill>
+            <a:srgbClr val="D97706"/>
+          </a:solidFill>
+          <a:ln>
+            <a:noFill/>
+          </a:ln>
+        </p:spPr>
+        <p:style>
+          <a:lnRef idx="1">
+            <a:schemeClr val="accent1"/>
+          </a:lnRef>
+          <a:fillRef idx="3">
+            <a:schemeClr val="accent1"/>
+          </a:fillRef>
+          <a:effectRef idx="2">
+            <a:schemeClr val="accent1"/>
+          </a:effectRef>
+          <a:fontRef idx="minor">
+            <a:schemeClr val="lt1"/>
+          </a:fontRef>
+        </p:style>
+        <p:txBody>
+          <a:bodyPr rtlCol="0" anchor="ctr"/>
+          <a:lstStyle/>
+          <a:p>
+            <a:pPr algn="ctr"/>
+          </a:p>
+        </p:txBody>
+      </p:sp>
+      <p:sp>
+        <p:nvSpPr>
+          <p:cNvPr id="5" name="TextBox 4"/>
           <p:cNvSpPr txBox="1"/>
           <p:nvPr/>
         </p:nvSpPr>
         <p:spPr>
           <a:xfrm>
-            <a:off x="1280160" y="1097280"/>
-            <a:ext cx="10058400" cy="4663440"/>
+            <a:off x="1234440" y="1005840"/>
+            <a:ext cx="10241280" cy="4846320"/>
           </a:xfrm>
           <a:prstGeom prst="rect">
             <a:avLst/>
@@ -3201,70 +3244,165 @@
           <a:p>
             <a:pPr>
               <a:spcAft>
+                <a:spcPts val="1000"/>
+              </a:spcAft>
+              <a:defRPr b="1" sz="1300">
+                <a:solidFill>
+                  <a:srgbClr val="D97706"/>
+                </a:solidFill>
+              </a:defRPr>
+            </a:pPr>
+            <a:r>
+              <a:t>PCCST501 Computer Networks | KTU 2024 Scheme • MODULE 2 • M2.2.3</a:t>
+            </a:r>
+          </a:p>
+          <a:p>
+            <a:pPr>
+              <a:spcAft>
                 <a:spcPts val="1200"/>
               </a:spcAft>
-              <a:defRPr b="1" sz="1300">
-                <a:solidFill>
-                  <a:srgbClr val="D97706"/>
+              <a:defRPr b="1" sz="3000">
+                <a:solidFill>
+                  <a:srgbClr val="F8FAFC"/>
                 </a:solidFill>
               </a:defRPr>
             </a:pPr>
             <a:r>
-              <a:t>PCCST501 Computer Networks | KTU 2024 Scheme • MODULE 2 • M2.2.3</a:t>
+              <a:t>Unicast Routing Protocols &amp; Algorithms</a:t>
             </a:r>
           </a:p>
           <a:p>
             <a:pPr>
               <a:spcAft>
-                <a:spcPts val="1400"/>
+                <a:spcPts val="2400"/>
               </a:spcAft>
-              <a:defRPr b="1" sz="3200">
-                <a:solidFill>
-                  <a:srgbClr val="F8FAFC"/>
+              <a:defRPr sz="1600">
+                <a:solidFill>
+                  <a:srgbClr val="94A3B8"/>
                 </a:solidFill>
               </a:defRPr>
             </a:pPr>
             <a:r>
-              <a:t>Unicast Routing Protocols</a:t>
+              <a:t>Link-State Routing &amp; Dijkstra's Algorithm, Distance-Vector &amp; Bellman-Ford, Count-to-Infinity, RIP, OSPF &amp; BGP-4</a:t>
             </a:r>
           </a:p>
           <a:p>
             <a:pPr>
               <a:spcAft>
-                <a:spcPts val="2800"/>
+                <a:spcPts val="300"/>
               </a:spcAft>
-              <a:defRPr sz="1700">
+              <a:defRPr b="1" sz="1350">
+                <a:solidFill>
+                  <a:srgbClr val="E2E8F0"/>
+                </a:solidFill>
+              </a:defRPr>
+            </a:pPr>
+            <a:r>
+              <a:t>Prepared by: Prof. Anju Markose | Assistant Professor, Dept. of CSE | VJCET</a:t>
+            </a:r>
+          </a:p>
+          <a:p>
+            <a:pPr>
+              <a:defRPr sz="1150">
                 <a:solidFill>
                   <a:srgbClr val="94A3B8"/>
                 </a:solidFill>
               </a:defRPr>
             </a:pPr>
             <a:r>
-              <a:t>Distance Vector (Bellman-Ford, RIP, Count-to-Infinity), Link State (Dijkstra, OSPF) &amp; Path Vector (BGP)</a:t>
-            </a:r>
-          </a:p>
+              <a:t>Viswajyothi College of Engineering and Technology (VJCET), Vazhakulam • KTU S5 CSE</a:t>
+            </a:r>
+          </a:p>
+        </p:txBody>
+      </p:sp>
+      <p:sp>
+        <p:nvSpPr>
+          <p:cNvPr id="6" name="Rounded Rectangle 5"/>
+          <p:cNvSpPr/>
+          <p:nvPr/>
+        </p:nvSpPr>
+        <p:spPr>
+          <a:xfrm>
+            <a:off x="8412480" y="5120640"/>
+            <a:ext cx="3017520" cy="822960"/>
+          </a:xfrm>
+          <a:prstGeom prst="roundRect">
+            <a:avLst/>
+          </a:prstGeom>
+          <a:solidFill>
+            <a:srgbClr val="1E293B"/>
+          </a:solidFill>
+          <a:ln w="12700">
+            <a:solidFill>
+              <a:srgbClr val="0E7490"/>
+            </a:solidFill>
+          </a:ln>
+        </p:spPr>
+        <p:style>
+          <a:lnRef idx="1">
+            <a:schemeClr val="accent1"/>
+          </a:lnRef>
+          <a:fillRef idx="3">
+            <a:schemeClr val="accent1"/>
+          </a:fillRef>
+          <a:effectRef idx="2">
+            <a:schemeClr val="accent1"/>
+          </a:effectRef>
+          <a:fontRef idx="minor">
+            <a:schemeClr val="lt1"/>
+          </a:fontRef>
+        </p:style>
+        <p:txBody>
+          <a:bodyPr rtlCol="0" anchor="ctr"/>
+          <a:lstStyle/>
+          <a:p>
+            <a:pPr algn="ctr"/>
+          </a:p>
+        </p:txBody>
+      </p:sp>
+      <p:sp>
+        <p:nvSpPr>
+          <p:cNvPr id="7" name="TextBox 6"/>
+          <p:cNvSpPr txBox="1"/>
+          <p:nvPr/>
+        </p:nvSpPr>
+        <p:spPr>
+          <a:xfrm>
+            <a:off x="8503920" y="5166360"/>
+            <a:ext cx="2834640" cy="731520"/>
+          </a:xfrm>
+          <a:prstGeom prst="rect">
+            <a:avLst/>
+          </a:prstGeom>
+          <a:noFill/>
+        </p:spPr>
+        <p:txBody>
+          <a:bodyPr wrap="none">
+            <a:spAutoFit/>
+          </a:bodyPr>
+          <a:lstStyle/>
           <a:p>
             <a:pPr>
-              <a:defRPr b="1" sz="1300">
-                <a:solidFill>
-                  <a:srgbClr val="E2E8F0"/>
+              <a:defRPr b="1" sz="1050">
+                <a:solidFill>
+                  <a:srgbClr val="D97706"/>
                 </a:solidFill>
               </a:defRPr>
             </a:pPr>
             <a:r>
-              <a:t>Prepared by: Prof. Anju Markose | Assistant Professor, Dept. of CSE | VJCET</a:t>
+              <a:t>KTU B.Tech Curriculum</a:t>
             </a:r>
           </a:p>
           <a:p>
             <a:pPr>
-              <a:defRPr sz="1100">
-                <a:solidFill>
-                  <a:srgbClr val="94A3B8"/>
+              <a:defRPr sz="950">
+                <a:solidFill>
+                  <a:srgbClr val="F8FAFC"/>
                 </a:solidFill>
               </a:defRPr>
             </a:pPr>
             <a:r>
-              <a:t>Viswajyothi College of Engineering and Technology (VJCET), Vazhakulam</a:t>
+              <a:t>Official Classroom Slide Deck</a:t>
             </a:r>
           </a:p>
         </p:txBody>
@@ -3396,14 +3534,14 @@
           <a:lstStyle/>
           <a:p>
             <a:pPr>
-              <a:defRPr b="1" sz="2300">
+              <a:defRPr b="1" sz="2200">
                 <a:solidFill>
                   <a:srgbClr val="F8FAFC"/>
                 </a:solidFill>
               </a:defRPr>
             </a:pPr>
             <a:r>
-              <a:t>2.2.3.1 Distance Vector vs Link State Routing</a:t>
+              <a:t>2.2.3.1 Link-State (LS) vs Distance-Vector (DV) Algorithms</a:t>
             </a:r>
           </a:p>
         </p:txBody>
@@ -3438,7 +3576,7 @@
               </a:defRPr>
             </a:pPr>
             <a:r>
-              <a:t>M2.2.3 ROUTING PARADIGMS</a:t>
+              <a:t>M2.2.3 LS VS DV ROUTING</a:t>
             </a:r>
           </a:p>
         </p:txBody>
@@ -3451,18 +3589,18 @@
         </p:nvSpPr>
         <p:spPr>
           <a:xfrm>
-            <a:off x="731520" y="1280160"/>
-            <a:ext cx="5212080" cy="4846320"/>
+            <a:off x="731520" y="1234440"/>
+            <a:ext cx="5212080" cy="4892040"/>
           </a:xfrm>
           <a:prstGeom prst="roundRect">
             <a:avLst/>
           </a:prstGeom>
           <a:solidFill>
-            <a:srgbClr val="F1F5F9"/>
+            <a:srgbClr val="F8FAFC"/>
           </a:solidFill>
           <a:ln w="19050">
             <a:solidFill>
-              <a:srgbClr val="0E7490"/>
+              <a:srgbClr val="0F1E4A"/>
             </a:solidFill>
           </a:ln>
         </p:spPr>
@@ -3496,7 +3634,7 @@
         </p:nvSpPr>
         <p:spPr>
           <a:xfrm>
-            <a:off x="914400" y="1417320"/>
+            <a:off x="914400" y="1371600"/>
             <a:ext cx="4846320" cy="4572000"/>
           </a:xfrm>
           <a:prstGeom prst="rect">
@@ -3512,91 +3650,91 @@
           <a:p>
             <a:pPr>
               <a:spcAft>
-                <a:spcPts val="1200"/>
+                <a:spcPts val="1000"/>
               </a:spcAft>
-              <a:defRPr b="1" sz="1600">
+              <a:defRPr b="1" sz="1550">
                 <a:solidFill>
                   <a:srgbClr val="0F1E4A"/>
                 </a:solidFill>
               </a:defRPr>
             </a:pPr>
             <a:r>
-              <a:t>Distance Vector (Bellman-Ford / RIP)</a:t>
+              <a:t>Link-State (LS) Routing (e.g., OSPF)</a:t>
             </a:r>
           </a:p>
           <a:p>
             <a:pPr>
               <a:spcAft>
-                <a:spcPts val="600"/>
+                <a:spcPts val="500"/>
               </a:spcAft>
-              <a:defRPr sz="1250">
-                <a:solidFill>
-                  <a:srgbClr val="1E293B"/>
+              <a:defRPr sz="1200">
+                <a:solidFill>
+                  <a:srgbClr val="0F172A"/>
                 </a:solidFill>
               </a:defRPr>
             </a:pPr>
             <a:r>
-              <a:t>• Information Shared: Vector of least-cost distances to all destinations</a:t>
+              <a:t>• Global Topology Knowledge: Every router floods link-state advertisements (LSAs); all nodes possess full network topology graph</a:t>
             </a:r>
           </a:p>
           <a:p>
             <a:pPr>
               <a:spcAft>
-                <a:spcPts val="600"/>
+                <a:spcPts val="500"/>
               </a:spcAft>
-              <a:defRPr sz="1250">
-                <a:solidFill>
-                  <a:srgbClr val="1E293B"/>
+              <a:defRPr sz="1200">
+                <a:solidFill>
+                  <a:srgbClr val="0F172A"/>
                 </a:solidFill>
               </a:defRPr>
             </a:pPr>
             <a:r>
-              <a:t>• Shared With: Only directly connected physical neighbors</a:t>
+              <a:t>• Algorithm: Dijkstra's Shortest Path Algorithm run locally on each router</a:t>
             </a:r>
           </a:p>
           <a:p>
             <a:pPr>
               <a:spcAft>
-                <a:spcPts val="600"/>
+                <a:spcPts val="500"/>
               </a:spcAft>
-              <a:defRPr sz="1250">
-                <a:solidFill>
-                  <a:srgbClr val="1E293B"/>
+              <a:defRPr sz="1200">
+                <a:solidFill>
+                  <a:srgbClr val="0F172A"/>
                 </a:solidFill>
               </a:defRPr>
             </a:pPr>
             <a:r>
-              <a:t>• Exchange Timing: Periodically (e.g. RIP every 30s) and on trigger</a:t>
+              <a:t>• Convergence Speed: Ultra-fast convergence; zero routing loops</a:t>
             </a:r>
           </a:p>
           <a:p>
             <a:pPr>
               <a:spcAft>
-                <a:spcPts val="600"/>
+                <a:spcPts val="500"/>
               </a:spcAft>
-              <a:defRPr sz="1250">
-                <a:solidFill>
-                  <a:srgbClr val="1E293B"/>
+              <a:defRPr sz="1200">
+                <a:solidFill>
+                  <a:srgbClr val="0F172A"/>
                 </a:solidFill>
               </a:defRPr>
             </a:pPr>
             <a:r>
-              <a:t>• Convergence: Slow convergence; susceptible to routing loops</a:t>
+              <a:t>• Message Overhead: $O(N \cdot E)$ messages flooded periodically</a:t>
             </a:r>
           </a:p>
           <a:p>
             <a:pPr>
               <a:spcAft>
-                <a:spcPts val="600"/>
+                <a:spcPts val="500"/>
               </a:spcAft>
-              <a:defRPr sz="1250">
-                <a:solidFill>
-                  <a:srgbClr val="1E293B"/>
+              <a:defRPr sz="1200">
+                <a:solidFill>
+                  <a:srgbClr val="0F172A"/>
                 </a:solidFill>
               </a:defRPr>
             </a:pPr>
             <a:r>
-              <a:t>• Algorithm: Bellman-Ford Equation: $D_x(y) = \min_v \{ c(x,v) + D_v(y) \}$</a:t>
+              <a:t>• Complexity: $O(V^2)$ or $O(E \log V)$ computation per router</a:t>
             </a:r>
           </a:p>
         </p:txBody>
@@ -3609,8 +3747,8 @@
         </p:nvSpPr>
         <p:spPr>
           <a:xfrm>
-            <a:off x="6309360" y="1280160"/>
-            <a:ext cx="5212080" cy="4846320"/>
+            <a:off x="6309360" y="1234440"/>
+            <a:ext cx="5212080" cy="4892040"/>
           </a:xfrm>
           <a:prstGeom prst="roundRect">
             <a:avLst/>
@@ -3620,7 +3758,7 @@
           </a:solidFill>
           <a:ln w="19050">
             <a:solidFill>
-              <a:srgbClr val="0F1E4A"/>
+              <a:srgbClr val="0E7490"/>
             </a:solidFill>
           </a:ln>
         </p:spPr>
@@ -3654,7 +3792,7 @@
         </p:nvSpPr>
         <p:spPr>
           <a:xfrm>
-            <a:off x="6492240" y="1417320"/>
+            <a:off x="6492240" y="1371600"/>
             <a:ext cx="4846320" cy="4572000"/>
           </a:xfrm>
           <a:prstGeom prst="rect">
@@ -3670,91 +3808,91 @@
           <a:p>
             <a:pPr>
               <a:spcAft>
-                <a:spcPts val="1200"/>
+                <a:spcPts val="1000"/>
               </a:spcAft>
-              <a:defRPr b="1" sz="1600">
+              <a:defRPr b="1" sz="1550">
                 <a:solidFill>
                   <a:srgbClr val="0E7490"/>
                 </a:solidFill>
               </a:defRPr>
             </a:pPr>
             <a:r>
-              <a:t>Link State (Dijkstra / OSPF)</a:t>
+              <a:t>Distance-Vector (DV) Routing (e.g., RIP)</a:t>
             </a:r>
           </a:p>
           <a:p>
             <a:pPr>
               <a:spcAft>
-                <a:spcPts val="600"/>
+                <a:spcPts val="500"/>
               </a:spcAft>
-              <a:defRPr sz="1250">
-                <a:solidFill>
-                  <a:srgbClr val="1E293B"/>
+              <a:defRPr sz="1200">
+                <a:solidFill>
+                  <a:srgbClr val="0F172A"/>
                 </a:solidFill>
               </a:defRPr>
             </a:pPr>
             <a:r>
-              <a:t>• Information Shared: Status and cost of directly connected links (LSAs)</a:t>
+              <a:t>• Local Knowledge Only: Routers only know cost to immediate direct neighbors; exchange vectors periodically</a:t>
             </a:r>
           </a:p>
           <a:p>
             <a:pPr>
               <a:spcAft>
-                <a:spcPts val="600"/>
+                <a:spcPts val="500"/>
               </a:spcAft>
-              <a:defRPr sz="1250">
-                <a:solidFill>
-                  <a:srgbClr val="1E293B"/>
+              <a:defRPr sz="1200">
+                <a:solidFill>
+                  <a:srgbClr val="0F172A"/>
                 </a:solidFill>
               </a:defRPr>
             </a:pPr>
             <a:r>
-              <a:t>• Shared With: Flooded to ALL routers in entire network / area</a:t>
+              <a:t>• Algorithm: Distributed Bellman-Ford equation: $d_x(y) = \min_v \{c(x,v) + d_v(y)\}$</a:t>
             </a:r>
           </a:p>
           <a:p>
             <a:pPr>
               <a:spcAft>
-                <a:spcPts val="600"/>
+                <a:spcPts val="500"/>
               </a:spcAft>
-              <a:defRPr sz="1250">
-                <a:solidFill>
-                  <a:srgbClr val="1E293B"/>
+              <a:defRPr sz="1200">
+                <a:solidFill>
+                  <a:srgbClr val="0F172A"/>
                 </a:solidFill>
               </a:defRPr>
             </a:pPr>
             <a:r>
-              <a:t>• Exchange Timing: Only when link state changes (event-driven)</a:t>
+              <a:t>• Convergence Speed: Slow convergence; susceptible to Count-to-Infinity problem</a:t>
             </a:r>
           </a:p>
           <a:p>
             <a:pPr>
               <a:spcAft>
-                <a:spcPts val="600"/>
+                <a:spcPts val="500"/>
               </a:spcAft>
-              <a:defRPr sz="1250">
-                <a:solidFill>
-                  <a:srgbClr val="1E293B"/>
+              <a:defRPr sz="1200">
+                <a:solidFill>
+                  <a:srgbClr val="0F172A"/>
                 </a:solidFill>
               </a:defRPr>
             </a:pPr>
             <a:r>
-              <a:t>• Convergence: Rapid convergence; loop-free topology knowledge</a:t>
+              <a:t>• Mitigation: Split Horizon and Poisoned Reverse rules</a:t>
             </a:r>
           </a:p>
           <a:p>
             <a:pPr>
               <a:spcAft>
-                <a:spcPts val="600"/>
+                <a:spcPts val="500"/>
               </a:spcAft>
-              <a:defRPr sz="1250">
-                <a:solidFill>
-                  <a:srgbClr val="1E293B"/>
+              <a:defRPr sz="1200">
+                <a:solidFill>
+                  <a:srgbClr val="0F172A"/>
                 </a:solidFill>
               </a:defRPr>
             </a:pPr>
             <a:r>
-              <a:t>• Algorithm: Dijkstra's Shortest Path Tree computation</a:t>
+              <a:t>• Simplicity: Lightweight computation; suitable for small networks</a:t>
             </a:r>
           </a:p>
         </p:txBody>
@@ -3767,8 +3905,8 @@
         </p:nvSpPr>
         <p:spPr>
           <a:xfrm>
-            <a:off x="731520" y="6309360"/>
-            <a:ext cx="10789920" cy="365760"/>
+            <a:off x="731520" y="6327648"/>
+            <a:ext cx="10789920" cy="320040"/>
           </a:xfrm>
           <a:prstGeom prst="rect">
             <a:avLst/>
@@ -3790,6 +3928,41 @@
             </a:pPr>
             <a:r>
               <a:t>PCCST501 Computer Networks | KTU 2024 Scheme | Prof. Anju Markose | Assistant Professor, Dept. of CSE | VJCET</a:t>
+            </a:r>
+          </a:p>
+        </p:txBody>
+      </p:sp>
+      <p:sp>
+        <p:nvSpPr>
+          <p:cNvPr id="11" name="TextBox 10"/>
+          <p:cNvSpPr txBox="1"/>
+          <p:nvPr/>
+        </p:nvSpPr>
+        <p:spPr>
+          <a:xfrm>
+            <a:off x="6858000" y="6327648"/>
+            <a:ext cx="4572000" cy="320040"/>
+          </a:xfrm>
+          <a:prstGeom prst="rect">
+            <a:avLst/>
+          </a:prstGeom>
+          <a:noFill/>
+        </p:spPr>
+        <p:txBody>
+          <a:bodyPr wrap="none">
+            <a:spAutoFit/>
+          </a:bodyPr>
+          <a:lstStyle/>
+          <a:p>
+            <a:pPr algn="r">
+              <a:defRPr sz="950">
+                <a:solidFill>
+                  <a:srgbClr val="64748B"/>
+                </a:solidFill>
+              </a:defRPr>
+            </a:pPr>
+            <a:r>
+              <a:t>Dept. of CSE, VJCET</a:t>
             </a:r>
           </a:p>
         </p:txBody>
@@ -3921,14 +4094,14 @@
           <a:lstStyle/>
           <a:p>
             <a:pPr>
-              <a:defRPr b="1" sz="2300">
+              <a:defRPr b="1" sz="2200">
                 <a:solidFill>
                   <a:srgbClr val="F8FAFC"/>
                 </a:solidFill>
               </a:defRPr>
             </a:pPr>
             <a:r>
-              <a:t>2.2.3.2 Count-to-Infinity &amp; Distance Vector Remedies</a:t>
+              <a:t>2.2.3.2 Internet Routing Protocols: RIP vs OSPF vs BGP-4</a:t>
             </a:r>
           </a:p>
         </p:txBody>
@@ -3963,7 +4136,7 @@
               </a:defRPr>
             </a:pPr>
             <a:r>
-              <a:t>M2.2.3 DV REMEDIES</a:t>
+              <a:t>M2.2.3 PROTOCOL COMPARISON</a:t>
             </a:r>
           </a:p>
         </p:txBody>
@@ -3976,7 +4149,7 @@
         </p:nvSpPr>
         <p:spPr>
           <a:xfrm>
-            <a:off x="731520" y="1280160"/>
+            <a:off x="731520" y="1234440"/>
             <a:ext cx="6858000" cy="4937760"/>
           </a:xfrm>
           <a:prstGeom prst="rect">
@@ -3994,29 +4167,29 @@
               <a:spcAft>
                 <a:spcPts val="200"/>
               </a:spcAft>
-              <a:defRPr b="1" sz="1500">
+              <a:defRPr b="1" sz="1450">
                 <a:solidFill>
                   <a:srgbClr val="0F1E4A"/>
                 </a:solidFill>
               </a:defRPr>
             </a:pPr>
             <a:r>
-              <a:t>• The Count-to-Infinity Problem</a:t>
+              <a:t>• RIP (Routing Information Protocol - RFC 2453)</a:t>
             </a:r>
           </a:p>
           <a:p>
             <a:pPr>
               <a:spcAft>
-                <a:spcPts val="800"/>
+                <a:spcPts val="700"/>
               </a:spcAft>
-              <a:defRPr sz="1300">
-                <a:solidFill>
-                  <a:srgbClr val="1E293B"/>
+              <a:defRPr sz="1250">
+                <a:solidFill>
+                  <a:srgbClr val="0F172A"/>
                 </a:solidFill>
               </a:defRPr>
             </a:pPr>
             <a:r>
-              <a:t>   When a link fails, two routers can create a routing loop by continually updating each other with incrementing hop counts (e.g., $A \to B \to A \to \dots$).</a:t>
+              <a:t>   Intra-AS Distance Vector protocol. Uses Hop Count metric (max 15 hops; 16 = infinity). Updates broadcast every 30s over UDP port 520.</a:t>
             </a:r>
           </a:p>
           <a:p>
@@ -4024,29 +4197,29 @@
               <a:spcAft>
                 <a:spcPts val="200"/>
               </a:spcAft>
-              <a:defRPr b="1" sz="1500">
+              <a:defRPr b="1" sz="1450">
                 <a:solidFill>
                   <a:srgbClr val="0F1E4A"/>
                 </a:solidFill>
               </a:defRPr>
             </a:pPr>
             <a:r>
-              <a:t>• Remedy 1: Define Infinity as 16 (RIP)</a:t>
+              <a:t>• OSPF (Open Shortest Path First - RFC 2328)</a:t>
             </a:r>
           </a:p>
           <a:p>
             <a:pPr>
               <a:spcAft>
-                <a:spcPts val="800"/>
+                <a:spcPts val="700"/>
               </a:spcAft>
-              <a:defRPr sz="1300">
-                <a:solidFill>
-                  <a:srgbClr val="1E293B"/>
+              <a:defRPr sz="1250">
+                <a:solidFill>
+                  <a:srgbClr val="0F172A"/>
                 </a:solidFill>
               </a:defRPr>
             </a:pPr>
             <a:r>
-              <a:t>   Routing Information Protocol sets maximum hop metric to 15. A hop count of 16 means 'Unreachable', stopping infinite looping.</a:t>
+              <a:t>   Intra-AS Link State protocol. Uses link cost based on inverse bandwidth. Hierarchical design with Area 0 (Backbone Area) and non-backbone areas. Runs directly over IP protocol 89. Supports authenticated LSA flooding and ECMP (Equal-Cost Multi-Path).</a:t>
             </a:r>
           </a:p>
           <a:p>
@@ -4054,89 +4227,29 @@
               <a:spcAft>
                 <a:spcPts val="200"/>
               </a:spcAft>
-              <a:defRPr b="1" sz="1500">
+              <a:defRPr b="1" sz="1450">
                 <a:solidFill>
                   <a:srgbClr val="0F1E4A"/>
                 </a:solidFill>
               </a:defRPr>
             </a:pPr>
             <a:r>
-              <a:t>• Remedy 2: Split Horizon Rule</a:t>
+              <a:t>• BGP-4 (Border Gateway Protocol - RFC 4271)</a:t>
             </a:r>
           </a:p>
           <a:p>
             <a:pPr>
               <a:spcAft>
-                <a:spcPts val="800"/>
+                <a:spcPts val="700"/>
               </a:spcAft>
-              <a:defRPr sz="1300">
-                <a:solidFill>
-                  <a:srgbClr val="1E293B"/>
+              <a:defRPr sz="1250">
+                <a:solidFill>
+                  <a:srgbClr val="0F172A"/>
                 </a:solidFill>
               </a:defRPr>
             </a:pPr>
             <a:r>
-              <a:t>   A router does NOT advertise a route back out the same interface through which it learned that route.</a:t>
-            </a:r>
-          </a:p>
-          <a:p>
-            <a:pPr>
-              <a:spcAft>
-                <a:spcPts val="200"/>
-              </a:spcAft>
-              <a:defRPr b="1" sz="1500">
-                <a:solidFill>
-                  <a:srgbClr val="0F1E4A"/>
-                </a:solidFill>
-              </a:defRPr>
-            </a:pPr>
-            <a:r>
-              <a:t>• Remedy 3: Poison Reverse</a:t>
-            </a:r>
-          </a:p>
-          <a:p>
-            <a:pPr>
-              <a:spcAft>
-                <a:spcPts val="800"/>
-              </a:spcAft>
-              <a:defRPr sz="1300">
-                <a:solidFill>
-                  <a:srgbClr val="1E293B"/>
-                </a:solidFill>
-              </a:defRPr>
-            </a:pPr>
-            <a:r>
-              <a:t>   If router A routes traffic to destination X through neighbor B, router A advertises route to X back to B with metric = $\infty$ (16), preventing B from ever routing back to A.</a:t>
-            </a:r>
-          </a:p>
-          <a:p>
-            <a:pPr>
-              <a:spcAft>
-                <a:spcPts val="200"/>
-              </a:spcAft>
-              <a:defRPr b="1" sz="1500">
-                <a:solidFill>
-                  <a:srgbClr val="0F1E4A"/>
-                </a:solidFill>
-              </a:defRPr>
-            </a:pPr>
-            <a:r>
-              <a:t>• Remedy 4: Triggered Updates</a:t>
-            </a:r>
-          </a:p>
-          <a:p>
-            <a:pPr>
-              <a:spcAft>
-                <a:spcPts val="800"/>
-              </a:spcAft>
-              <a:defRPr sz="1300">
-                <a:solidFill>
-                  <a:srgbClr val="1E293B"/>
-                </a:solidFill>
-              </a:defRPr>
-            </a:pPr>
-            <a:r>
-              <a:t>   Routers send update messages immediately upon detecting a link failure rather than waiting for regular 30s timer.</a:t>
+              <a:t>   Inter-AS Path Vector protocol glueing the global Internet together. Operates over reliable TCP port 179. Advertises AS-PATH attributes to prevent loops and enforces policy-based business routing between Autonomous Systems (eBGP and iBGP).</a:t>
             </a:r>
           </a:p>
         </p:txBody>
@@ -4149,14 +4262,14 @@
         </p:nvSpPr>
         <p:spPr>
           <a:xfrm>
-            <a:off x="7955279" y="1280160"/>
-            <a:ext cx="3566160" cy="4846320"/>
+            <a:off x="7955279" y="1234440"/>
+            <a:ext cx="3566160" cy="4892040"/>
           </a:xfrm>
           <a:prstGeom prst="roundRect">
             <a:avLst/>
           </a:prstGeom>
           <a:solidFill>
-            <a:srgbClr val="F1F5F9"/>
+            <a:srgbClr val="F8FAFC"/>
           </a:solidFill>
           <a:ln w="19050">
             <a:solidFill>
@@ -4194,7 +4307,7 @@
         </p:nvSpPr>
         <p:spPr>
           <a:xfrm>
-            <a:off x="8138160" y="1417320"/>
+            <a:off x="8138160" y="1371600"/>
             <a:ext cx="3200400" cy="4572000"/>
           </a:xfrm>
           <a:prstGeom prst="rect">
@@ -4219,7 +4332,7 @@
               </a:defRPr>
             </a:pPr>
             <a:r>
-              <a:t>RIP Protocol Summary</a:t>
+              <a:t>Protocol Matrix</a:t>
             </a:r>
           </a:p>
           <a:p>
@@ -4229,12 +4342,12 @@
               </a:spcAft>
               <a:defRPr sz="1200">
                 <a:solidFill>
-                  <a:srgbClr val="1E293B"/>
+                  <a:srgbClr val="0F172A"/>
                 </a:solidFill>
               </a:defRPr>
             </a:pPr>
             <a:r>
-              <a:t>→ Algorithm: Distance Vector</a:t>
+              <a:t>→ RIP: DV, Hop count (Max 15), UDP 520</a:t>
             </a:r>
           </a:p>
           <a:p>
@@ -4244,12 +4357,12 @@
               </a:spcAft>
               <a:defRPr sz="1200">
                 <a:solidFill>
-                  <a:srgbClr val="1E293B"/>
+                  <a:srgbClr val="0F172A"/>
                 </a:solidFill>
               </a:defRPr>
             </a:pPr>
             <a:r>
-              <a:t>→ Metric: Hop count (Max 15)</a:t>
+              <a:t>→ OSPF: LS, Dijkstra, IP 89, Areas</a:t>
             </a:r>
           </a:p>
           <a:p>
@@ -4259,12 +4372,12 @@
               </a:spcAft>
               <a:defRPr sz="1200">
                 <a:solidFill>
-                  <a:srgbClr val="1E293B"/>
+                  <a:srgbClr val="0F172A"/>
                 </a:solidFill>
               </a:defRPr>
             </a:pPr>
             <a:r>
-              <a:t>→ Port: UDP 520</a:t>
+              <a:t>→ BGP: Path Vector, AS-PATH, TCP 179</a:t>
             </a:r>
           </a:p>
           <a:p>
@@ -4274,12 +4387,12 @@
               </a:spcAft>
               <a:defRPr sz="1200">
                 <a:solidFill>
-                  <a:srgbClr val="1E293B"/>
+                  <a:srgbClr val="0F172A"/>
                 </a:solidFill>
               </a:defRPr>
             </a:pPr>
             <a:r>
-              <a:t>→ Periodic Timer: 30 seconds</a:t>
+              <a:t>→ Intra-AS: RIP, OSPF</a:t>
             </a:r>
           </a:p>
           <a:p>
@@ -4289,12 +4402,12 @@
               </a:spcAft>
               <a:defRPr sz="1200">
                 <a:solidFill>
-                  <a:srgbClr val="1E293B"/>
+                  <a:srgbClr val="0F172A"/>
                 </a:solidFill>
               </a:defRPr>
             </a:pPr>
             <a:r>
-              <a:t>→ Split Horizon + Poison Reverse</a:t>
+              <a:t>→ Inter-AS: BGP-4</a:t>
             </a:r>
           </a:p>
         </p:txBody>
@@ -4307,8 +4420,8 @@
         </p:nvSpPr>
         <p:spPr>
           <a:xfrm>
-            <a:off x="731520" y="6309360"/>
-            <a:ext cx="10789920" cy="365760"/>
+            <a:off x="731520" y="6327648"/>
+            <a:ext cx="10789920" cy="320040"/>
           </a:xfrm>
           <a:prstGeom prst="rect">
             <a:avLst/>
@@ -4330,6 +4443,41 @@
             </a:pPr>
             <a:r>
               <a:t>PCCST501 Computer Networks | KTU 2024 Scheme | Prof. Anju Markose | Assistant Professor, Dept. of CSE | VJCET</a:t>
+            </a:r>
+          </a:p>
+        </p:txBody>
+      </p:sp>
+      <p:sp>
+        <p:nvSpPr>
+          <p:cNvPr id="10" name="TextBox 9"/>
+          <p:cNvSpPr txBox="1"/>
+          <p:nvPr/>
+        </p:nvSpPr>
+        <p:spPr>
+          <a:xfrm>
+            <a:off x="6858000" y="6327648"/>
+            <a:ext cx="4572000" cy="320040"/>
+          </a:xfrm>
+          <a:prstGeom prst="rect">
+            <a:avLst/>
+          </a:prstGeom>
+          <a:noFill/>
+        </p:spPr>
+        <p:txBody>
+          <a:bodyPr wrap="none">
+            <a:spAutoFit/>
+          </a:bodyPr>
+          <a:lstStyle/>
+          <a:p>
+            <a:pPr algn="r">
+              <a:defRPr sz="950">
+                <a:solidFill>
+                  <a:srgbClr val="64748B"/>
+                </a:solidFill>
+              </a:defRPr>
+            </a:pPr>
+            <a:r>
+              <a:t>Dept. of CSE, VJCET</a:t>
             </a:r>
           </a:p>
         </p:txBody>
@@ -4461,14 +4609,14 @@
           <a:lstStyle/>
           <a:p>
             <a:pPr>
-              <a:defRPr b="1" sz="2300">
+              <a:defRPr b="1" sz="2100">
                 <a:solidFill>
                   <a:srgbClr val="F8FAFC"/>
                 </a:solidFill>
               </a:defRPr>
             </a:pPr>
             <a:r>
-              <a:t>2.2.3.3 OSPF &amp; BGP Internet Routing Hierarchy</a:t>
+              <a:t>🎯 Exam Booster &amp; Review: Unicast Routing Protocols</a:t>
             </a:r>
           </a:p>
         </p:txBody>
@@ -4503,174 +4651,31 @@
               </a:defRPr>
             </a:pPr>
             <a:r>
-              <a:t>M2.2.3 OSPF &amp; BGP</a:t>
-            </a:r>
-          </a:p>
-        </p:txBody>
-      </p:sp>
-      <p:sp>
-        <p:nvSpPr>
-          <p:cNvPr id="6" name="TextBox 5"/>
-          <p:cNvSpPr txBox="1"/>
-          <p:nvPr/>
-        </p:nvSpPr>
-        <p:spPr>
-          <a:xfrm>
-            <a:off x="731520" y="1280160"/>
-            <a:ext cx="6858000" cy="4937760"/>
-          </a:xfrm>
-          <a:prstGeom prst="rect">
-            <a:avLst/>
-          </a:prstGeom>
-          <a:noFill/>
-        </p:spPr>
-        <p:txBody>
-          <a:bodyPr wrap="square">
-            <a:spAutoFit/>
-          </a:bodyPr>
-          <a:lstStyle/>
-          <a:p>
-            <a:pPr>
-              <a:spcAft>
-                <a:spcPts val="200"/>
-              </a:spcAft>
-              <a:defRPr b="1" sz="1500">
-                <a:solidFill>
-                  <a:srgbClr val="0F1E4A"/>
-                </a:solidFill>
-              </a:defRPr>
-            </a:pPr>
-            <a:r>
-              <a:t>• Open Shortest Path First (OSPF)</a:t>
-            </a:r>
-          </a:p>
-          <a:p>
-            <a:pPr>
-              <a:spcAft>
-                <a:spcPts val="800"/>
-              </a:spcAft>
-              <a:defRPr sz="1300">
-                <a:solidFill>
-                  <a:srgbClr val="1E293B"/>
-                </a:solidFill>
-              </a:defRPr>
-            </a:pPr>
-            <a:r>
-              <a:t>   Interior Gateway Protocol (IGP) based on Link State. Directly encapsulates in IP (Protocol 89). Supports authentication, equal-cost multi-path (ECMP), and Hierarchical Areas.</a:t>
-            </a:r>
-          </a:p>
-          <a:p>
-            <a:pPr>
-              <a:spcAft>
-                <a:spcPts val="200"/>
-              </a:spcAft>
-              <a:defRPr b="1" sz="1500">
-                <a:solidFill>
-                  <a:srgbClr val="0F1E4A"/>
-                </a:solidFill>
-              </a:defRPr>
-            </a:pPr>
-            <a:r>
-              <a:t>• OSPF Area Hierarchy</a:t>
-            </a:r>
-          </a:p>
-          <a:p>
-            <a:pPr>
-              <a:spcAft>
-                <a:spcPts val="800"/>
-              </a:spcAft>
-              <a:defRPr sz="1300">
-                <a:solidFill>
-                  <a:srgbClr val="1E293B"/>
-                </a:solidFill>
-              </a:defRPr>
-            </a:pPr>
-            <a:r>
-              <a:t>   Backbone Area (Area 0) connects non-backbone areas. Area Border Routers (ABRs) summarize routing between areas, limiting LSA flooding scale.</a:t>
-            </a:r>
-          </a:p>
-          <a:p>
-            <a:pPr>
-              <a:spcAft>
-                <a:spcPts val="200"/>
-              </a:spcAft>
-              <a:defRPr b="1" sz="1500">
-                <a:solidFill>
-                  <a:srgbClr val="0F1E4A"/>
-                </a:solidFill>
-              </a:defRPr>
-            </a:pPr>
-            <a:r>
-              <a:t>• Border Gateway Protocol (BGP-4)</a:t>
-            </a:r>
-          </a:p>
-          <a:p>
-            <a:pPr>
-              <a:spcAft>
-                <a:spcPts val="800"/>
-              </a:spcAft>
-              <a:defRPr sz="1300">
-                <a:solidFill>
-                  <a:srgbClr val="1E293B"/>
-                </a:solidFill>
-              </a:defRPr>
-            </a:pPr>
-            <a:r>
-              <a:t>   The de-facto standard Inter-Autonomous System (Inter-AS / EGP) routing protocol connecting global ISPs over TCP (Port 179).</a:t>
-            </a:r>
-          </a:p>
-          <a:p>
-            <a:pPr>
-              <a:spcAft>
-                <a:spcPts val="200"/>
-              </a:spcAft>
-              <a:defRPr b="1" sz="1500">
-                <a:solidFill>
-                  <a:srgbClr val="0F1E4A"/>
-                </a:solidFill>
-              </a:defRPr>
-            </a:pPr>
-            <a:r>
-              <a:t>• Path Vector Routing in BGP</a:t>
-            </a:r>
-          </a:p>
-          <a:p>
-            <a:pPr>
-              <a:spcAft>
-                <a:spcPts val="800"/>
-              </a:spcAft>
-              <a:defRPr sz="1300">
-                <a:solidFill>
-                  <a:srgbClr val="1E293B"/>
-                </a:solidFill>
-              </a:defRPr>
-            </a:pPr>
-            <a:r>
-              <a:t>   BGP advertisements include full `AS-PATH` attribute (list of Autonomous System numbers traversed). Prevents loops by discarding routes containing router's own AS number.</a:t>
-            </a:r>
-          </a:p>
-        </p:txBody>
-      </p:sp>
-      <p:sp>
-        <p:nvSpPr>
-          <p:cNvPr id="7" name="Rounded Rectangle 6"/>
+              <a:t>M2.2.3</a:t>
+            </a:r>
+          </a:p>
+        </p:txBody>
+      </p:sp>
+      <p:sp>
+        <p:nvSpPr>
+          <p:cNvPr id="6" name="Rounded Rectangle 5"/>
           <p:cNvSpPr/>
           <p:nvPr/>
         </p:nvSpPr>
         <p:spPr>
           <a:xfrm>
-            <a:off x="7955279" y="1280160"/>
-            <a:ext cx="3566160" cy="4846320"/>
+            <a:off x="731520" y="1234440"/>
+            <a:ext cx="5303520" cy="4892040"/>
           </a:xfrm>
           <a:prstGeom prst="roundRect">
             <a:avLst/>
           </a:prstGeom>
           <a:solidFill>
-            <a:srgbClr val="F1F5F9"/>
+            <a:srgbClr val="FEF3C7"/>
           </a:solidFill>
           <a:ln w="19050">
             <a:solidFill>
-              <a:srgbClr val="0E7490"/>
+              <a:srgbClr val="D97706"/>
             </a:solidFill>
           </a:ln>
         </p:spPr>
@@ -4698,14 +4703,14 @@
       </p:sp>
       <p:sp>
         <p:nvSpPr>
-          <p:cNvPr id="8" name="TextBox 7"/>
+          <p:cNvPr id="7" name="TextBox 6"/>
           <p:cNvSpPr txBox="1"/>
           <p:nvPr/>
         </p:nvSpPr>
         <p:spPr>
           <a:xfrm>
-            <a:off x="8138160" y="1417320"/>
-            <a:ext cx="3200400" cy="4572000"/>
+            <a:off x="914400" y="1371600"/>
+            <a:ext cx="4937760" cy="4572000"/>
           </a:xfrm>
           <a:prstGeom prst="rect">
             <a:avLst/>
@@ -4722,14 +4727,142 @@
               <a:spcAft>
                 <a:spcPts val="1000"/>
               </a:spcAft>
-              <a:defRPr b="1" sz="1500">
+              <a:defRPr b="1" sz="1450">
+                <a:solidFill>
+                  <a:srgbClr val="D97706"/>
+                </a:solidFill>
+              </a:defRPr>
+            </a:pPr>
+            <a:r>
+              <a:t>📚 KTU High-Yield Questions (K3 Apply)</a:t>
+            </a:r>
+          </a:p>
+          <a:p>
+            <a:pPr>
+              <a:spcAft>
+                <a:spcPts val="700"/>
+              </a:spcAft>
+              <a:defRPr sz="1200">
+                <a:solidFill>
+                  <a:srgbClr val="0F172A"/>
+                </a:solidFill>
+              </a:defRPr>
+            </a:pPr>
+            <a:r>
+              <a:t>Q: Explain Dijkstra's shortest path algorithm with a step-by-step table derivation for a 5-node network graph. (9 Marks)</a:t>
+            </a:r>
+          </a:p>
+          <a:p>
+            <a:pPr>
+              <a:spcAft>
+                <a:spcPts val="700"/>
+              </a:spcAft>
+              <a:defRPr sz="1200">
+                <a:solidFill>
+                  <a:srgbClr val="0F172A"/>
+                </a:solidFill>
+              </a:defRPr>
+            </a:pPr>
+            <a:r>
+              <a:t>Q: What is the Count-to-Infinity problem in Distance Vector routing? Explain how Split Horizon and Poisoned Reverse mitigate it. (8 Marks)</a:t>
+            </a:r>
+          </a:p>
+          <a:p>
+            <a:pPr>
+              <a:spcAft>
+                <a:spcPts val="700"/>
+              </a:spcAft>
+              <a:defRPr sz="1200">
+                <a:solidFill>
+                  <a:srgbClr val="0F172A"/>
+                </a:solidFill>
+              </a:defRPr>
+            </a:pPr>
+            <a:r>
+              <a:t>Q: Compare RIP, OSPF, and BGP-4 with respect to routing algorithm, metric, transport protocol, and scalability. (8 Marks)</a:t>
+            </a:r>
+          </a:p>
+        </p:txBody>
+      </p:sp>
+      <p:sp>
+        <p:nvSpPr>
+          <p:cNvPr id="8" name="Rounded Rectangle 7"/>
+          <p:cNvSpPr/>
+          <p:nvPr/>
+        </p:nvSpPr>
+        <p:spPr>
+          <a:xfrm>
+            <a:off x="6309360" y="1234440"/>
+            <a:ext cx="5212080" cy="4892040"/>
+          </a:xfrm>
+          <a:prstGeom prst="roundRect">
+            <a:avLst/>
+          </a:prstGeom>
+          <a:solidFill>
+            <a:srgbClr val="EEF2FF"/>
+          </a:solidFill>
+          <a:ln w="19050">
+            <a:solidFill>
+              <a:srgbClr val="0E7490"/>
+            </a:solidFill>
+          </a:ln>
+        </p:spPr>
+        <p:style>
+          <a:lnRef idx="1">
+            <a:schemeClr val="accent1"/>
+          </a:lnRef>
+          <a:fillRef idx="3">
+            <a:schemeClr val="accent1"/>
+          </a:fillRef>
+          <a:effectRef idx="2">
+            <a:schemeClr val="accent1"/>
+          </a:effectRef>
+          <a:fontRef idx="minor">
+            <a:schemeClr val="lt1"/>
+          </a:fontRef>
+        </p:style>
+        <p:txBody>
+          <a:bodyPr rtlCol="0" anchor="ctr"/>
+          <a:lstStyle/>
+          <a:p>
+            <a:pPr algn="ctr"/>
+          </a:p>
+        </p:txBody>
+      </p:sp>
+      <p:sp>
+        <p:nvSpPr>
+          <p:cNvPr id="9" name="TextBox 8"/>
+          <p:cNvSpPr txBox="1"/>
+          <p:nvPr/>
+        </p:nvSpPr>
+        <p:spPr>
+          <a:xfrm>
+            <a:off x="6492240" y="1371600"/>
+            <a:ext cx="4846320" cy="4572000"/>
+          </a:xfrm>
+          <a:prstGeom prst="rect">
+            <a:avLst/>
+          </a:prstGeom>
+          <a:noFill/>
+        </p:spPr>
+        <p:txBody>
+          <a:bodyPr wrap="square">
+            <a:spAutoFit/>
+          </a:bodyPr>
+          <a:lstStyle/>
+          <a:p>
+            <a:pPr>
+              <a:spcAft>
+                <a:spcPts val="1000"/>
+              </a:spcAft>
+              <a:defRPr b="1" sz="1450">
                 <a:solidFill>
                   <a:srgbClr val="0E7490"/>
                 </a:solidFill>
               </a:defRPr>
             </a:pPr>
             <a:r>
-              <a:t>Routing Matrix</a:t>
+              <a:t>💡 Critical Conceptual Takeaways</a:t>
             </a:r>
           </a:p>
           <a:p>
@@ -4739,12 +4872,12 @@
               </a:spcAft>
               <a:defRPr sz="1200">
                 <a:solidFill>
-                  <a:srgbClr val="1E293B"/>
+                  <a:srgbClr val="0F172A"/>
                 </a:solidFill>
               </a:defRPr>
             </a:pPr>
             <a:r>
-              <a:t>→ RIP: Distance Vector (Hops &lt; 16)</a:t>
+              <a:t>✔ Dijkstra computes shortest path trees using complete topological knowledge.</a:t>
             </a:r>
           </a:p>
           <a:p>
@@ -4754,12 +4887,12 @@
               </a:spcAft>
               <a:defRPr sz="1200">
                 <a:solidFill>
-                  <a:srgbClr val="1E293B"/>
+                  <a:srgbClr val="0F172A"/>
                 </a:solidFill>
               </a:defRPr>
             </a:pPr>
             <a:r>
-              <a:t>→ OSPF: Link State (Cost/Bandwidth)</a:t>
+              <a:t>✔ Distance vector iterates Bellman-Ford equations among adjacent neighbors.</a:t>
             </a:r>
           </a:p>
           <a:p>
@@ -4769,12 +4902,12 @@
               </a:spcAft>
               <a:defRPr sz="1200">
                 <a:solidFill>
-                  <a:srgbClr val="1E293B"/>
+                  <a:srgbClr val="0F172A"/>
                 </a:solidFill>
               </a:defRPr>
             </a:pPr>
             <a:r>
-              <a:t>→ BGP: Path Vector (AS-PATH, Policy)</a:t>
+              <a:t>✔ OSPF structures networks into areas with Area 0 backbone to scale within large enterprises.</a:t>
             </a:r>
           </a:p>
           <a:p>
@@ -4784,41 +4917,26 @@
               </a:spcAft>
               <a:defRPr sz="1200">
                 <a:solidFill>
-                  <a:srgbClr val="1E293B"/>
+                  <a:srgbClr val="0F172A"/>
                 </a:solidFill>
               </a:defRPr>
             </a:pPr>
             <a:r>
-              <a:t>→ Intra-AS: OSPF, RIP</a:t>
-            </a:r>
-          </a:p>
-          <a:p>
-            <a:pPr>
-              <a:spcAft>
-                <a:spcPts val="600"/>
-              </a:spcAft>
-              <a:defRPr sz="1200">
-                <a:solidFill>
-                  <a:srgbClr val="1E293B"/>
-                </a:solidFill>
-              </a:defRPr>
-            </a:pPr>
-            <a:r>
-              <a:t>→ Inter-AS: BGP-4</a:t>
-            </a:r>
-          </a:p>
-        </p:txBody>
-      </p:sp>
-      <p:sp>
-        <p:nvSpPr>
-          <p:cNvPr id="9" name="TextBox 8"/>
+              <a:t>✔ BGP-4 implements policy routing and loop prevention across Autonomous Systems using AS-PATH.</a:t>
+            </a:r>
+          </a:p>
+        </p:txBody>
+      </p:sp>
+      <p:sp>
+        <p:nvSpPr>
+          <p:cNvPr id="10" name="TextBox 9"/>
           <p:cNvSpPr txBox="1"/>
           <p:nvPr/>
         </p:nvSpPr>
         <p:spPr>
           <a:xfrm>
-            <a:off x="731520" y="6309360"/>
-            <a:ext cx="10789920" cy="365760"/>
+            <a:off x="731520" y="6327648"/>
+            <a:ext cx="10789920" cy="320040"/>
           </a:xfrm>
           <a:prstGeom prst="rect">
             <a:avLst/>
@@ -4840,6 +4958,41 @@
             </a:pPr>
             <a:r>
               <a:t>PCCST501 Computer Networks | KTU 2024 Scheme | Prof. Anju Markose | Assistant Professor, Dept. of CSE | VJCET</a:t>
+            </a:r>
+          </a:p>
+        </p:txBody>
+      </p:sp>
+      <p:sp>
+        <p:nvSpPr>
+          <p:cNvPr id="11" name="TextBox 10"/>
+          <p:cNvSpPr txBox="1"/>
+          <p:nvPr/>
+        </p:nvSpPr>
+        <p:spPr>
+          <a:xfrm>
+            <a:off x="6858000" y="6327648"/>
+            <a:ext cx="4572000" cy="320040"/>
+          </a:xfrm>
+          <a:prstGeom prst="rect">
+            <a:avLst/>
+          </a:prstGeom>
+          <a:noFill/>
+        </p:spPr>
+        <p:txBody>
+          <a:bodyPr wrap="none">
+            <a:spAutoFit/>
+          </a:bodyPr>
+          <a:lstStyle/>
+          <a:p>
+            <a:pPr algn="r">
+              <a:defRPr sz="950">
+                <a:solidFill>
+                  <a:srgbClr val="64748B"/>
+                </a:solidFill>
+              </a:defRPr>
+            </a:pPr>
+            <a:r>
+              <a:t>Dept. of CSE, VJCET</a:t>
             </a:r>
           </a:p>
         </p:txBody>
